--- a/04_项目四_填制和审核会计凭证/04-00_项目四_上课投影_v1.0_20260821.pptx
+++ b/04_项目四_填制和审核会计凭证/04-00_项目四_上课投影_v1.0_20260821.pptx
@@ -11,6 +11,14 @@
     <p:sldId id="259" r:id="rId10"/>
     <p:sldId id="260" r:id="rId11"/>
     <p:sldId id="261" r:id="rId12"/>
+    <p:sldId id="262" r:id="rId13"/>
+    <p:sldId id="263" r:id="rId14"/>
+    <p:sldId id="264" r:id="rId15"/>
+    <p:sldId id="265" r:id="rId16"/>
+    <p:sldId id="266" r:id="rId17"/>
+    <p:sldId id="267" r:id="rId18"/>
+    <p:sldId id="268" r:id="rId19"/>
+    <p:sldId id="269" r:id="rId20"/>
   </p:sldIdLst>
   <p:sldSz cx="12191695" cy="6858000" type="screen4x3"/>
   <p:notesSz cx="6858000" cy="9144000"/>
@@ -3310,6 +3318,1188 @@
 </p:sld>
 </file>
 
+<file path=ppt/slides/slide10.xml><?xml version="1.0" encoding="utf-8"?>
+<p:sld xmlns:a="http://schemas.openxmlformats.org/drawingml/2006/main" xmlns:p="http://schemas.openxmlformats.org/presentationml/2006/main" xmlns:r="http://schemas.openxmlformats.org/officeDocument/2006/relationships">
+  <p:cSld>
+    <p:spTree>
+      <p:nvGrpSpPr>
+        <p:cNvPr id="1" name=""/>
+        <p:cNvGrpSpPr/>
+        <p:nvPr/>
+      </p:nvGrpSpPr>
+      <p:grpSpPr/>
+      <p:sp>
+        <p:nvSpPr>
+          <p:cNvPr id="2" name="Rectangle 1"/>
+          <p:cNvSpPr/>
+          <p:nvPr/>
+        </p:nvSpPr>
+        <p:spPr>
+          <a:xfrm>
+            <a:off x="0" y="0"/>
+            <a:ext cx="12191695" cy="749808"/>
+          </a:xfrm>
+          <a:prstGeom prst="rect">
+            <a:avLst/>
+          </a:prstGeom>
+          <a:solidFill>
+            <a:srgbClr val="BF360C"/>
+          </a:solidFill>
+          <a:ln>
+            <a:noFill/>
+          </a:ln>
+        </p:spPr>
+        <p:style>
+          <a:lnRef idx="1">
+            <a:schemeClr val="accent1"/>
+          </a:lnRef>
+          <a:fillRef idx="3">
+            <a:schemeClr val="accent1"/>
+          </a:fillRef>
+          <a:effectRef idx="2">
+            <a:schemeClr val="accent1"/>
+          </a:effectRef>
+          <a:fontRef idx="minor">
+            <a:schemeClr val="lt1"/>
+          </a:fontRef>
+        </p:style>
+        <p:txBody>
+          <a:bodyPr rtlCol="0" anchor="ctr"/>
+          <a:lstStyle/>
+          <a:p>
+            <a:pPr algn="ctr"/>
+          </a:p>
+        </p:txBody>
+      </p:sp>
+      <p:sp>
+        <p:nvSpPr>
+          <p:cNvPr id="3" name="TextBox 2"/>
+          <p:cNvSpPr txBox="1"/>
+          <p:nvPr/>
+        </p:nvSpPr>
+        <p:spPr>
+          <a:xfrm>
+            <a:off x="274320" y="128016"/>
+            <a:ext cx="11612880" cy="512064"/>
+          </a:xfrm>
+          <a:prstGeom prst="rect">
+            <a:avLst/>
+          </a:prstGeom>
+          <a:noFill/>
+        </p:spPr>
+        <p:txBody>
+          <a:bodyPr wrap="square">
+            <a:spAutoFit/>
+          </a:bodyPr>
+          <a:lstStyle/>
+          <a:p>
+            <a:pPr>
+              <a:spcAft>
+                <a:spcPts val="400"/>
+              </a:spcAft>
+            </a:pPr>
+            <a:r>
+              <a:rPr sz="2200" b="1">
+                <a:solidFill>
+                  <a:srgbClr val="FFFFFF"/>
+                </a:solidFill>
+                <a:latin typeface="微软雅黑"/>
+                <a:ea typeface="微软雅黑"/>
+                <a:cs typeface="微软雅黑"/>
+              </a:rPr>
+              <a:t>连环画① 收到发票</a:t>
+            </a:r>
+          </a:p>
+        </p:txBody>
+      </p:sp>
+      <p:pic>
+        <p:nvPicPr>
+          <p:cNvPr id="4" name="Picture 3" descr="项目四-09_连环画1收到发票.jpg"/>
+          <p:cNvPicPr>
+            <a:picLocks noChangeAspect="1"/>
+          </p:cNvPicPr>
+          <p:nvPr/>
+        </p:nvPicPr>
+        <p:blipFill>
+          <a:blip r:embed="rId2"/>
+          <a:stretch>
+            <a:fillRect/>
+          </a:stretch>
+        </p:blipFill>
+        <p:spPr>
+          <a:xfrm>
+            <a:off x="365760" y="914400"/>
+            <a:ext cx="8453120" cy="4754880"/>
+          </a:xfrm>
+          <a:prstGeom prst="rect">
+            <a:avLst/>
+          </a:prstGeom>
+        </p:spPr>
+      </p:pic>
+      <p:sp>
+        <p:nvSpPr>
+          <p:cNvPr id="5" name="Rectangle 4"/>
+          <p:cNvSpPr/>
+          <p:nvPr/>
+        </p:nvSpPr>
+        <p:spPr>
+          <a:xfrm>
+            <a:off x="0" y="5897880"/>
+            <a:ext cx="12191695" cy="960120"/>
+          </a:xfrm>
+          <a:prstGeom prst="rect">
+            <a:avLst/>
+          </a:prstGeom>
+          <a:solidFill>
+            <a:srgbClr val="2E7D32"/>
+          </a:solidFill>
+          <a:ln>
+            <a:noFill/>
+          </a:ln>
+        </p:spPr>
+        <p:style>
+          <a:lnRef idx="1">
+            <a:schemeClr val="accent1"/>
+          </a:lnRef>
+          <a:fillRef idx="3">
+            <a:schemeClr val="accent1"/>
+          </a:fillRef>
+          <a:effectRef idx="2">
+            <a:schemeClr val="accent1"/>
+          </a:effectRef>
+          <a:fontRef idx="minor">
+            <a:schemeClr val="lt1"/>
+          </a:fontRef>
+        </p:style>
+        <p:txBody>
+          <a:bodyPr rtlCol="0" anchor="ctr"/>
+          <a:lstStyle/>
+          <a:p>
+            <a:pPr algn="ctr"/>
+          </a:p>
+        </p:txBody>
+      </p:sp>
+      <p:sp>
+        <p:nvSpPr>
+          <p:cNvPr id="6" name="TextBox 5"/>
+          <p:cNvSpPr txBox="1"/>
+          <p:nvPr/>
+        </p:nvSpPr>
+        <p:spPr>
+          <a:xfrm>
+            <a:off x="274320" y="5961888"/>
+            <a:ext cx="11612880" cy="841248"/>
+          </a:xfrm>
+          <a:prstGeom prst="rect">
+            <a:avLst/>
+          </a:prstGeom>
+          <a:noFill/>
+        </p:spPr>
+        <p:txBody>
+          <a:bodyPr wrap="square">
+            <a:spAutoFit/>
+          </a:bodyPr>
+          <a:lstStyle/>
+          <a:p>
+            <a:pPr>
+              <a:spcAft>
+                <a:spcPts val="400"/>
+              </a:spcAft>
+            </a:pPr>
+            <a:r>
+              <a:rPr sz="1500" b="1">
+                <a:solidFill>
+                  <a:srgbClr val="FFFFFF"/>
+                </a:solidFill>
+                <a:latin typeface="微软雅黑"/>
+                <a:ea typeface="微软雅黑"/>
+                <a:cs typeface="微软雅黑"/>
+              </a:rPr>
+              <a:t>现在你：看图，听老师。先别录音。不用交。</a:t>
+            </a:r>
+          </a:p>
+        </p:txBody>
+      </p:sp>
+    </p:spTree>
+  </p:cSld>
+  <p:clrMapOvr>
+    <a:masterClrMapping/>
+  </p:clrMapOvr>
+</p:sld>
+</file>
+
+<file path=ppt/slides/slide11.xml><?xml version="1.0" encoding="utf-8"?>
+<p:sld xmlns:a="http://schemas.openxmlformats.org/drawingml/2006/main" xmlns:p="http://schemas.openxmlformats.org/presentationml/2006/main" xmlns:r="http://schemas.openxmlformats.org/officeDocument/2006/relationships">
+  <p:cSld>
+    <p:spTree>
+      <p:nvGrpSpPr>
+        <p:cNvPr id="1" name=""/>
+        <p:cNvGrpSpPr/>
+        <p:nvPr/>
+      </p:nvGrpSpPr>
+      <p:grpSpPr/>
+      <p:sp>
+        <p:nvSpPr>
+          <p:cNvPr id="2" name="Rectangle 1"/>
+          <p:cNvSpPr/>
+          <p:nvPr/>
+        </p:nvSpPr>
+        <p:spPr>
+          <a:xfrm>
+            <a:off x="0" y="0"/>
+            <a:ext cx="12191695" cy="749808"/>
+          </a:xfrm>
+          <a:prstGeom prst="rect">
+            <a:avLst/>
+          </a:prstGeom>
+          <a:solidFill>
+            <a:srgbClr val="BF360C"/>
+          </a:solidFill>
+          <a:ln>
+            <a:noFill/>
+          </a:ln>
+        </p:spPr>
+        <p:style>
+          <a:lnRef idx="1">
+            <a:schemeClr val="accent1"/>
+          </a:lnRef>
+          <a:fillRef idx="3">
+            <a:schemeClr val="accent1"/>
+          </a:fillRef>
+          <a:effectRef idx="2">
+            <a:schemeClr val="accent1"/>
+          </a:effectRef>
+          <a:fontRef idx="minor">
+            <a:schemeClr val="lt1"/>
+          </a:fontRef>
+        </p:style>
+        <p:txBody>
+          <a:bodyPr rtlCol="0" anchor="ctr"/>
+          <a:lstStyle/>
+          <a:p>
+            <a:pPr algn="ctr"/>
+          </a:p>
+        </p:txBody>
+      </p:sp>
+      <p:sp>
+        <p:nvSpPr>
+          <p:cNvPr id="3" name="TextBox 2"/>
+          <p:cNvSpPr txBox="1"/>
+          <p:nvPr/>
+        </p:nvSpPr>
+        <p:spPr>
+          <a:xfrm>
+            <a:off x="274320" y="128016"/>
+            <a:ext cx="11612880" cy="512064"/>
+          </a:xfrm>
+          <a:prstGeom prst="rect">
+            <a:avLst/>
+          </a:prstGeom>
+          <a:noFill/>
+        </p:spPr>
+        <p:txBody>
+          <a:bodyPr wrap="square">
+            <a:spAutoFit/>
+          </a:bodyPr>
+          <a:lstStyle/>
+          <a:p>
+            <a:pPr>
+              <a:spcAft>
+                <a:spcPts val="400"/>
+              </a:spcAft>
+            </a:pPr>
+            <a:r>
+              <a:rPr sz="2200" b="1">
+                <a:solidFill>
+                  <a:srgbClr val="FFFFFF"/>
+                </a:solidFill>
+                <a:latin typeface="微软雅黑"/>
+                <a:ea typeface="微软雅黑"/>
+                <a:cs typeface="微软雅黑"/>
+              </a:rPr>
+              <a:t>连环画② 想科目</a:t>
+            </a:r>
+          </a:p>
+        </p:txBody>
+      </p:sp>
+      <p:pic>
+        <p:nvPicPr>
+          <p:cNvPr id="4" name="Picture 3" descr="项目四-10_连环画2判断科目.jpg"/>
+          <p:cNvPicPr>
+            <a:picLocks noChangeAspect="1"/>
+          </p:cNvPicPr>
+          <p:nvPr/>
+        </p:nvPicPr>
+        <p:blipFill>
+          <a:blip r:embed="rId2"/>
+          <a:stretch>
+            <a:fillRect/>
+          </a:stretch>
+        </p:blipFill>
+        <p:spPr>
+          <a:xfrm>
+            <a:off x="365760" y="914400"/>
+            <a:ext cx="8453120" cy="4754880"/>
+          </a:xfrm>
+          <a:prstGeom prst="rect">
+            <a:avLst/>
+          </a:prstGeom>
+        </p:spPr>
+      </p:pic>
+      <p:sp>
+        <p:nvSpPr>
+          <p:cNvPr id="5" name="Rectangle 4"/>
+          <p:cNvSpPr/>
+          <p:nvPr/>
+        </p:nvSpPr>
+        <p:spPr>
+          <a:xfrm>
+            <a:off x="0" y="5897880"/>
+            <a:ext cx="12191695" cy="960120"/>
+          </a:xfrm>
+          <a:prstGeom prst="rect">
+            <a:avLst/>
+          </a:prstGeom>
+          <a:solidFill>
+            <a:srgbClr val="2E7D32"/>
+          </a:solidFill>
+          <a:ln>
+            <a:noFill/>
+          </a:ln>
+        </p:spPr>
+        <p:style>
+          <a:lnRef idx="1">
+            <a:schemeClr val="accent1"/>
+          </a:lnRef>
+          <a:fillRef idx="3">
+            <a:schemeClr val="accent1"/>
+          </a:fillRef>
+          <a:effectRef idx="2">
+            <a:schemeClr val="accent1"/>
+          </a:effectRef>
+          <a:fontRef idx="minor">
+            <a:schemeClr val="lt1"/>
+          </a:fontRef>
+        </p:style>
+        <p:txBody>
+          <a:bodyPr rtlCol="0" anchor="ctr"/>
+          <a:lstStyle/>
+          <a:p>
+            <a:pPr algn="ctr"/>
+          </a:p>
+        </p:txBody>
+      </p:sp>
+      <p:sp>
+        <p:nvSpPr>
+          <p:cNvPr id="6" name="TextBox 5"/>
+          <p:cNvSpPr txBox="1"/>
+          <p:nvPr/>
+        </p:nvSpPr>
+        <p:spPr>
+          <a:xfrm>
+            <a:off x="274320" y="5961888"/>
+            <a:ext cx="11612880" cy="841248"/>
+          </a:xfrm>
+          <a:prstGeom prst="rect">
+            <a:avLst/>
+          </a:prstGeom>
+          <a:noFill/>
+        </p:spPr>
+        <p:txBody>
+          <a:bodyPr wrap="square">
+            <a:spAutoFit/>
+          </a:bodyPr>
+          <a:lstStyle/>
+          <a:p>
+            <a:pPr>
+              <a:spcAft>
+                <a:spcPts val="400"/>
+              </a:spcAft>
+            </a:pPr>
+            <a:r>
+              <a:rPr sz="1500" b="1">
+                <a:solidFill>
+                  <a:srgbClr val="FFFFFF"/>
+                </a:solidFill>
+                <a:latin typeface="微软雅黑"/>
+                <a:ea typeface="微软雅黑"/>
+                <a:cs typeface="微软雅黑"/>
+              </a:rPr>
+              <a:t>现在你：看图，听老师。先别录音。不用交。</a:t>
+            </a:r>
+          </a:p>
+        </p:txBody>
+      </p:sp>
+    </p:spTree>
+  </p:cSld>
+  <p:clrMapOvr>
+    <a:masterClrMapping/>
+  </p:clrMapOvr>
+</p:sld>
+</file>
+
+<file path=ppt/slides/slide12.xml><?xml version="1.0" encoding="utf-8"?>
+<p:sld xmlns:a="http://schemas.openxmlformats.org/drawingml/2006/main" xmlns:p="http://schemas.openxmlformats.org/presentationml/2006/main" xmlns:r="http://schemas.openxmlformats.org/officeDocument/2006/relationships">
+  <p:cSld>
+    <p:spTree>
+      <p:nvGrpSpPr>
+        <p:cNvPr id="1" name=""/>
+        <p:cNvGrpSpPr/>
+        <p:nvPr/>
+      </p:nvGrpSpPr>
+      <p:grpSpPr/>
+      <p:sp>
+        <p:nvSpPr>
+          <p:cNvPr id="2" name="Rectangle 1"/>
+          <p:cNvSpPr/>
+          <p:nvPr/>
+        </p:nvSpPr>
+        <p:spPr>
+          <a:xfrm>
+            <a:off x="0" y="0"/>
+            <a:ext cx="12191695" cy="749808"/>
+          </a:xfrm>
+          <a:prstGeom prst="rect">
+            <a:avLst/>
+          </a:prstGeom>
+          <a:solidFill>
+            <a:srgbClr val="BF360C"/>
+          </a:solidFill>
+          <a:ln>
+            <a:noFill/>
+          </a:ln>
+        </p:spPr>
+        <p:style>
+          <a:lnRef idx="1">
+            <a:schemeClr val="accent1"/>
+          </a:lnRef>
+          <a:fillRef idx="3">
+            <a:schemeClr val="accent1"/>
+          </a:fillRef>
+          <a:effectRef idx="2">
+            <a:schemeClr val="accent1"/>
+          </a:effectRef>
+          <a:fontRef idx="minor">
+            <a:schemeClr val="lt1"/>
+          </a:fontRef>
+        </p:style>
+        <p:txBody>
+          <a:bodyPr rtlCol="0" anchor="ctr"/>
+          <a:lstStyle/>
+          <a:p>
+            <a:pPr algn="ctr"/>
+          </a:p>
+        </p:txBody>
+      </p:sp>
+      <p:sp>
+        <p:nvSpPr>
+          <p:cNvPr id="3" name="TextBox 2"/>
+          <p:cNvSpPr txBox="1"/>
+          <p:nvPr/>
+        </p:nvSpPr>
+        <p:spPr>
+          <a:xfrm>
+            <a:off x="274320" y="128016"/>
+            <a:ext cx="11612880" cy="512064"/>
+          </a:xfrm>
+          <a:prstGeom prst="rect">
+            <a:avLst/>
+          </a:prstGeom>
+          <a:noFill/>
+        </p:spPr>
+        <p:txBody>
+          <a:bodyPr wrap="square">
+            <a:spAutoFit/>
+          </a:bodyPr>
+          <a:lstStyle/>
+          <a:p>
+            <a:pPr>
+              <a:spcAft>
+                <a:spcPts val="400"/>
+              </a:spcAft>
+            </a:pPr>
+            <a:r>
+              <a:rPr sz="2200" b="1">
+                <a:solidFill>
+                  <a:srgbClr val="FFFFFF"/>
+                </a:solidFill>
+                <a:latin typeface="微软雅黑"/>
+                <a:ea typeface="微软雅黑"/>
+                <a:cs typeface="微软雅黑"/>
+              </a:rPr>
+              <a:t>连环画③ 填凭证</a:t>
+            </a:r>
+          </a:p>
+        </p:txBody>
+      </p:sp>
+      <p:pic>
+        <p:nvPicPr>
+          <p:cNvPr id="4" name="Picture 3" descr="项目四-12_连环画3填凭证.jpg"/>
+          <p:cNvPicPr>
+            <a:picLocks noChangeAspect="1"/>
+          </p:cNvPicPr>
+          <p:nvPr/>
+        </p:nvPicPr>
+        <p:blipFill>
+          <a:blip r:embed="rId2"/>
+          <a:stretch>
+            <a:fillRect/>
+          </a:stretch>
+        </p:blipFill>
+        <p:spPr>
+          <a:xfrm>
+            <a:off x="365760" y="914400"/>
+            <a:ext cx="8453120" cy="4754880"/>
+          </a:xfrm>
+          <a:prstGeom prst="rect">
+            <a:avLst/>
+          </a:prstGeom>
+        </p:spPr>
+      </p:pic>
+      <p:sp>
+        <p:nvSpPr>
+          <p:cNvPr id="5" name="Rectangle 4"/>
+          <p:cNvSpPr/>
+          <p:nvPr/>
+        </p:nvSpPr>
+        <p:spPr>
+          <a:xfrm>
+            <a:off x="0" y="5897880"/>
+            <a:ext cx="12191695" cy="960120"/>
+          </a:xfrm>
+          <a:prstGeom prst="rect">
+            <a:avLst/>
+          </a:prstGeom>
+          <a:solidFill>
+            <a:srgbClr val="2E7D32"/>
+          </a:solidFill>
+          <a:ln>
+            <a:noFill/>
+          </a:ln>
+        </p:spPr>
+        <p:style>
+          <a:lnRef idx="1">
+            <a:schemeClr val="accent1"/>
+          </a:lnRef>
+          <a:fillRef idx="3">
+            <a:schemeClr val="accent1"/>
+          </a:fillRef>
+          <a:effectRef idx="2">
+            <a:schemeClr val="accent1"/>
+          </a:effectRef>
+          <a:fontRef idx="minor">
+            <a:schemeClr val="lt1"/>
+          </a:fontRef>
+        </p:style>
+        <p:txBody>
+          <a:bodyPr rtlCol="0" anchor="ctr"/>
+          <a:lstStyle/>
+          <a:p>
+            <a:pPr algn="ctr"/>
+          </a:p>
+        </p:txBody>
+      </p:sp>
+      <p:sp>
+        <p:nvSpPr>
+          <p:cNvPr id="6" name="TextBox 5"/>
+          <p:cNvSpPr txBox="1"/>
+          <p:nvPr/>
+        </p:nvSpPr>
+        <p:spPr>
+          <a:xfrm>
+            <a:off x="274320" y="5961888"/>
+            <a:ext cx="11612880" cy="841248"/>
+          </a:xfrm>
+          <a:prstGeom prst="rect">
+            <a:avLst/>
+          </a:prstGeom>
+          <a:noFill/>
+        </p:spPr>
+        <p:txBody>
+          <a:bodyPr wrap="square">
+            <a:spAutoFit/>
+          </a:bodyPr>
+          <a:lstStyle/>
+          <a:p>
+            <a:pPr>
+              <a:spcAft>
+                <a:spcPts val="400"/>
+              </a:spcAft>
+            </a:pPr>
+            <a:r>
+              <a:rPr sz="1500" b="1">
+                <a:solidFill>
+                  <a:srgbClr val="FFFFFF"/>
+                </a:solidFill>
+                <a:latin typeface="微软雅黑"/>
+                <a:ea typeface="微软雅黑"/>
+                <a:cs typeface="微软雅黑"/>
+              </a:rPr>
+              <a:t>现在你：看图，听老师。先别录音。不用交。</a:t>
+            </a:r>
+          </a:p>
+        </p:txBody>
+      </p:sp>
+    </p:spTree>
+  </p:cSld>
+  <p:clrMapOvr>
+    <a:masterClrMapping/>
+  </p:clrMapOvr>
+</p:sld>
+</file>
+
+<file path=ppt/slides/slide13.xml><?xml version="1.0" encoding="utf-8"?>
+<p:sld xmlns:a="http://schemas.openxmlformats.org/drawingml/2006/main" xmlns:p="http://schemas.openxmlformats.org/presentationml/2006/main" xmlns:r="http://schemas.openxmlformats.org/officeDocument/2006/relationships">
+  <p:cSld>
+    <p:spTree>
+      <p:nvGrpSpPr>
+        <p:cNvPr id="1" name=""/>
+        <p:cNvGrpSpPr/>
+        <p:nvPr/>
+      </p:nvGrpSpPr>
+      <p:grpSpPr/>
+      <p:sp>
+        <p:nvSpPr>
+          <p:cNvPr id="2" name="Rectangle 1"/>
+          <p:cNvSpPr/>
+          <p:nvPr/>
+        </p:nvSpPr>
+        <p:spPr>
+          <a:xfrm>
+            <a:off x="0" y="0"/>
+            <a:ext cx="12191695" cy="749808"/>
+          </a:xfrm>
+          <a:prstGeom prst="rect">
+            <a:avLst/>
+          </a:prstGeom>
+          <a:solidFill>
+            <a:srgbClr val="BF360C"/>
+          </a:solidFill>
+          <a:ln>
+            <a:noFill/>
+          </a:ln>
+        </p:spPr>
+        <p:style>
+          <a:lnRef idx="1">
+            <a:schemeClr val="accent1"/>
+          </a:lnRef>
+          <a:fillRef idx="3">
+            <a:schemeClr val="accent1"/>
+          </a:fillRef>
+          <a:effectRef idx="2">
+            <a:schemeClr val="accent1"/>
+          </a:effectRef>
+          <a:fontRef idx="minor">
+            <a:schemeClr val="lt1"/>
+          </a:fontRef>
+        </p:style>
+        <p:txBody>
+          <a:bodyPr rtlCol="0" anchor="ctr"/>
+          <a:lstStyle/>
+          <a:p>
+            <a:pPr algn="ctr"/>
+          </a:p>
+        </p:txBody>
+      </p:sp>
+      <p:sp>
+        <p:nvSpPr>
+          <p:cNvPr id="3" name="TextBox 2"/>
+          <p:cNvSpPr txBox="1"/>
+          <p:nvPr/>
+        </p:nvSpPr>
+        <p:spPr>
+          <a:xfrm>
+            <a:off x="274320" y="128016"/>
+            <a:ext cx="11612880" cy="512064"/>
+          </a:xfrm>
+          <a:prstGeom prst="rect">
+            <a:avLst/>
+          </a:prstGeom>
+          <a:noFill/>
+        </p:spPr>
+        <p:txBody>
+          <a:bodyPr wrap="square">
+            <a:spAutoFit/>
+          </a:bodyPr>
+          <a:lstStyle/>
+          <a:p>
+            <a:pPr>
+              <a:spcAft>
+                <a:spcPts val="400"/>
+              </a:spcAft>
+            </a:pPr>
+            <a:r>
+              <a:rPr sz="2200" b="1">
+                <a:solidFill>
+                  <a:srgbClr val="FFFFFF"/>
+                </a:solidFill>
+                <a:latin typeface="微软雅黑"/>
+                <a:ea typeface="微软雅黑"/>
+                <a:cs typeface="微软雅黑"/>
+              </a:rPr>
+              <a:t>连环画④ 钉在一起</a:t>
+            </a:r>
+          </a:p>
+        </p:txBody>
+      </p:sp>
+      <p:pic>
+        <p:nvPicPr>
+          <p:cNvPr id="4" name="Picture 3" descr="项目四-13_连环画4装订.jpg"/>
+          <p:cNvPicPr>
+            <a:picLocks noChangeAspect="1"/>
+          </p:cNvPicPr>
+          <p:nvPr/>
+        </p:nvPicPr>
+        <p:blipFill>
+          <a:blip r:embed="rId2"/>
+          <a:stretch>
+            <a:fillRect/>
+          </a:stretch>
+        </p:blipFill>
+        <p:spPr>
+          <a:xfrm>
+            <a:off x="365760" y="914400"/>
+            <a:ext cx="8453120" cy="4754880"/>
+          </a:xfrm>
+          <a:prstGeom prst="rect">
+            <a:avLst/>
+          </a:prstGeom>
+        </p:spPr>
+      </p:pic>
+      <p:sp>
+        <p:nvSpPr>
+          <p:cNvPr id="5" name="Rectangle 4"/>
+          <p:cNvSpPr/>
+          <p:nvPr/>
+        </p:nvSpPr>
+        <p:spPr>
+          <a:xfrm>
+            <a:off x="0" y="5897880"/>
+            <a:ext cx="12191695" cy="960120"/>
+          </a:xfrm>
+          <a:prstGeom prst="rect">
+            <a:avLst/>
+          </a:prstGeom>
+          <a:solidFill>
+            <a:srgbClr val="2E7D32"/>
+          </a:solidFill>
+          <a:ln>
+            <a:noFill/>
+          </a:ln>
+        </p:spPr>
+        <p:style>
+          <a:lnRef idx="1">
+            <a:schemeClr val="accent1"/>
+          </a:lnRef>
+          <a:fillRef idx="3">
+            <a:schemeClr val="accent1"/>
+          </a:fillRef>
+          <a:effectRef idx="2">
+            <a:schemeClr val="accent1"/>
+          </a:effectRef>
+          <a:fontRef idx="minor">
+            <a:schemeClr val="lt1"/>
+          </a:fontRef>
+        </p:style>
+        <p:txBody>
+          <a:bodyPr rtlCol="0" anchor="ctr"/>
+          <a:lstStyle/>
+          <a:p>
+            <a:pPr algn="ctr"/>
+          </a:p>
+        </p:txBody>
+      </p:sp>
+      <p:sp>
+        <p:nvSpPr>
+          <p:cNvPr id="6" name="TextBox 5"/>
+          <p:cNvSpPr txBox="1"/>
+          <p:nvPr/>
+        </p:nvSpPr>
+        <p:spPr>
+          <a:xfrm>
+            <a:off x="274320" y="5961888"/>
+            <a:ext cx="11612880" cy="841248"/>
+          </a:xfrm>
+          <a:prstGeom prst="rect">
+            <a:avLst/>
+          </a:prstGeom>
+          <a:noFill/>
+        </p:spPr>
+        <p:txBody>
+          <a:bodyPr wrap="square">
+            <a:spAutoFit/>
+          </a:bodyPr>
+          <a:lstStyle/>
+          <a:p>
+            <a:pPr>
+              <a:spcAft>
+                <a:spcPts val="400"/>
+              </a:spcAft>
+            </a:pPr>
+            <a:r>
+              <a:rPr sz="1500" b="1">
+                <a:solidFill>
+                  <a:srgbClr val="FFFFFF"/>
+                </a:solidFill>
+                <a:latin typeface="微软雅黑"/>
+                <a:ea typeface="微软雅黑"/>
+                <a:cs typeface="微软雅黑"/>
+              </a:rPr>
+              <a:t>现在你：看图，听老师。先别录音。不用交。</a:t>
+            </a:r>
+          </a:p>
+        </p:txBody>
+      </p:sp>
+    </p:spTree>
+  </p:cSld>
+  <p:clrMapOvr>
+    <a:masterClrMapping/>
+  </p:clrMapOvr>
+</p:sld>
+</file>
+
+<file path=ppt/slides/slide14.xml><?xml version="1.0" encoding="utf-8"?>
+<p:sld xmlns:a="http://schemas.openxmlformats.org/drawingml/2006/main" xmlns:p="http://schemas.openxmlformats.org/presentationml/2006/main" xmlns:r="http://schemas.openxmlformats.org/officeDocument/2006/relationships">
+  <p:cSld>
+    <p:spTree>
+      <p:nvGrpSpPr>
+        <p:cNvPr id="1" name=""/>
+        <p:cNvGrpSpPr/>
+        <p:nvPr/>
+      </p:nvGrpSpPr>
+      <p:grpSpPr/>
+      <p:sp>
+        <p:nvSpPr>
+          <p:cNvPr id="2" name="Rectangle 1"/>
+          <p:cNvSpPr/>
+          <p:nvPr/>
+        </p:nvSpPr>
+        <p:spPr>
+          <a:xfrm>
+            <a:off x="0" y="0"/>
+            <a:ext cx="12191695" cy="6858000"/>
+          </a:xfrm>
+          <a:prstGeom prst="rect">
+            <a:avLst/>
+          </a:prstGeom>
+          <a:solidFill>
+            <a:srgbClr val="FFF8E1"/>
+          </a:solidFill>
+          <a:ln>
+            <a:noFill/>
+          </a:ln>
+        </p:spPr>
+        <p:style>
+          <a:lnRef idx="1">
+            <a:schemeClr val="accent1"/>
+          </a:lnRef>
+          <a:fillRef idx="3">
+            <a:schemeClr val="accent1"/>
+          </a:fillRef>
+          <a:effectRef idx="2">
+            <a:schemeClr val="accent1"/>
+          </a:effectRef>
+          <a:fontRef idx="minor">
+            <a:schemeClr val="lt1"/>
+          </a:fontRef>
+        </p:style>
+        <p:txBody>
+          <a:bodyPr rtlCol="0" anchor="ctr"/>
+          <a:lstStyle/>
+          <a:p>
+            <a:pPr algn="ctr"/>
+          </a:p>
+        </p:txBody>
+      </p:sp>
+      <p:sp>
+        <p:nvSpPr>
+          <p:cNvPr id="3" name="Rectangle 2"/>
+          <p:cNvSpPr/>
+          <p:nvPr/>
+        </p:nvSpPr>
+        <p:spPr>
+          <a:xfrm>
+            <a:off x="0" y="0"/>
+            <a:ext cx="12191695" cy="749808"/>
+          </a:xfrm>
+          <a:prstGeom prst="rect">
+            <a:avLst/>
+          </a:prstGeom>
+          <a:solidFill>
+            <a:srgbClr val="F9A825"/>
+          </a:solidFill>
+          <a:ln>
+            <a:noFill/>
+          </a:ln>
+        </p:spPr>
+        <p:style>
+          <a:lnRef idx="1">
+            <a:schemeClr val="accent1"/>
+          </a:lnRef>
+          <a:fillRef idx="3">
+            <a:schemeClr val="accent1"/>
+          </a:fillRef>
+          <a:effectRef idx="2">
+            <a:schemeClr val="accent1"/>
+          </a:effectRef>
+          <a:fontRef idx="minor">
+            <a:schemeClr val="lt1"/>
+          </a:fontRef>
+        </p:style>
+        <p:txBody>
+          <a:bodyPr rtlCol="0" anchor="ctr"/>
+          <a:lstStyle/>
+          <a:p>
+            <a:pPr algn="ctr"/>
+          </a:p>
+        </p:txBody>
+      </p:sp>
+      <p:sp>
+        <p:nvSpPr>
+          <p:cNvPr id="4" name="TextBox 3"/>
+          <p:cNvSpPr txBox="1"/>
+          <p:nvPr/>
+        </p:nvSpPr>
+        <p:spPr>
+          <a:xfrm>
+            <a:off x="274320" y="128016"/>
+            <a:ext cx="11612880" cy="512064"/>
+          </a:xfrm>
+          <a:prstGeom prst="rect">
+            <a:avLst/>
+          </a:prstGeom>
+          <a:noFill/>
+        </p:spPr>
+        <p:txBody>
+          <a:bodyPr wrap="square">
+            <a:spAutoFit/>
+          </a:bodyPr>
+          <a:lstStyle/>
+          <a:p>
+            <a:pPr>
+              <a:spcAft>
+                <a:spcPts val="400"/>
+              </a:spcAft>
+            </a:pPr>
+            <a:r>
+              <a:rPr sz="2200" b="1">
+                <a:solidFill>
+                  <a:srgbClr val="FFFFFF"/>
+                </a:solidFill>
+                <a:latin typeface="微软雅黑"/>
+                <a:ea typeface="微软雅黑"/>
+                <a:cs typeface="微软雅黑"/>
+              </a:rPr>
+              <a:t>课后就这一件　四格配音</a:t>
+            </a:r>
+          </a:p>
+        </p:txBody>
+      </p:sp>
+      <p:sp>
+        <p:nvSpPr>
+          <p:cNvPr id="5" name="TextBox 4"/>
+          <p:cNvSpPr txBox="1"/>
+          <p:nvPr/>
+        </p:nvSpPr>
+        <p:spPr>
+          <a:xfrm>
+            <a:off x="457200" y="960120"/>
+            <a:ext cx="11247120" cy="4754880"/>
+          </a:xfrm>
+          <a:prstGeom prst="rect">
+            <a:avLst/>
+          </a:prstGeom>
+          <a:noFill/>
+        </p:spPr>
+        <p:txBody>
+          <a:bodyPr wrap="square">
+            <a:spAutoFit/>
+          </a:bodyPr>
+          <a:lstStyle/>
+          <a:p>
+            <a:pPr>
+              <a:spcAft>
+                <a:spcPts val="400"/>
+              </a:spcAft>
+            </a:pPr>
+            <a:r>
+              <a:rPr sz="2200" b="0">
+                <a:solidFill>
+                  <a:srgbClr val="212121"/>
+                </a:solidFill>
+                <a:latin typeface="微软雅黑"/>
+                <a:ea typeface="微软雅黑"/>
+                <a:cs typeface="微软雅黑"/>
+              </a:rPr>
+              <a:t>把刚才四格按顺序配音，总共大约 40 秒，发班级群。</a:t>
+            </a:r>
+          </a:p>
+          <a:p>
+            <a:pPr>
+              <a:spcAft>
+                <a:spcPts val="400"/>
+              </a:spcAft>
+            </a:pPr>
+            <a:r>
+              <a:rPr sz="2200" b="0">
+                <a:solidFill>
+                  <a:srgbClr val="212121"/>
+                </a:solidFill>
+                <a:latin typeface="微软雅黑"/>
+                <a:ea typeface="微软雅黑"/>
+                <a:cs typeface="微软雅黑"/>
+              </a:rPr>
+              <a:t>必须说出：借哪个科目、贷哪个科目、金额多少。</a:t>
+            </a:r>
+          </a:p>
+          <a:p>
+            <a:pPr>
+              <a:spcAft>
+                <a:spcPts val="400"/>
+              </a:spcAft>
+            </a:pPr>
+            <a:r>
+              <a:rPr sz="2200" b="0">
+                <a:solidFill>
+                  <a:srgbClr val="212121"/>
+                </a:solidFill>
+                <a:latin typeface="微软雅黑"/>
+                <a:ea typeface="微软雅黑"/>
+                <a:cs typeface="微软雅黑"/>
+              </a:rPr>
+              <a:t>只说「记账凭证」。不要说收款凭证、付款凭证、转账凭证。</a:t>
+            </a:r>
+          </a:p>
+          <a:p>
+            <a:pPr>
+              <a:spcAft>
+                <a:spcPts val="400"/>
+              </a:spcAft>
+            </a:pPr>
+            <a:r>
+              <a:rPr sz="2200" b="0">
+                <a:solidFill>
+                  <a:srgbClr val="212121"/>
+                </a:solidFill>
+                <a:latin typeface="微软雅黑"/>
+                <a:ea typeface="微软雅黑"/>
+                <a:cs typeface="微软雅黑"/>
+              </a:rPr>
+              <a:t>交了 2 分。科目和借贷都说对 5 分。</a:t>
+            </a:r>
+          </a:p>
+          <a:p>
+            <a:pPr>
+              <a:spcAft>
+                <a:spcPts val="400"/>
+              </a:spcAft>
+            </a:pPr>
+            <a:r>
+              <a:rPr sz="2200" b="0">
+                <a:solidFill>
+                  <a:srgbClr val="212121"/>
+                </a:solidFill>
+                <a:latin typeface="微软雅黑"/>
+                <a:ea typeface="微软雅黑"/>
+                <a:cs typeface="微软雅黑"/>
+              </a:rPr>
+              <a:t>另外：练习纸再填一张电费 800。审核栏空着。不用交本子。</a:t>
+            </a:r>
+          </a:p>
+        </p:txBody>
+      </p:sp>
+      <p:sp>
+        <p:nvSpPr>
+          <p:cNvPr id="6" name="Rectangle 5"/>
+          <p:cNvSpPr/>
+          <p:nvPr/>
+        </p:nvSpPr>
+        <p:spPr>
+          <a:xfrm>
+            <a:off x="0" y="5897880"/>
+            <a:ext cx="12191695" cy="960120"/>
+          </a:xfrm>
+          <a:prstGeom prst="rect">
+            <a:avLst/>
+          </a:prstGeom>
+          <a:solidFill>
+            <a:srgbClr val="2E7D32"/>
+          </a:solidFill>
+          <a:ln>
+            <a:noFill/>
+          </a:ln>
+        </p:spPr>
+        <p:style>
+          <a:lnRef idx="1">
+            <a:schemeClr val="accent1"/>
+          </a:lnRef>
+          <a:fillRef idx="3">
+            <a:schemeClr val="accent1"/>
+          </a:fillRef>
+          <a:effectRef idx="2">
+            <a:schemeClr val="accent1"/>
+          </a:effectRef>
+          <a:fontRef idx="minor">
+            <a:schemeClr val="lt1"/>
+          </a:fontRef>
+        </p:style>
+        <p:txBody>
+          <a:bodyPr rtlCol="0" anchor="ctr"/>
+          <a:lstStyle/>
+          <a:p>
+            <a:pPr algn="ctr"/>
+          </a:p>
+        </p:txBody>
+      </p:sp>
+      <p:sp>
+        <p:nvSpPr>
+          <p:cNvPr id="7" name="TextBox 6"/>
+          <p:cNvSpPr txBox="1"/>
+          <p:nvPr/>
+        </p:nvSpPr>
+        <p:spPr>
+          <a:xfrm>
+            <a:off x="274320" y="5961888"/>
+            <a:ext cx="11612880" cy="841248"/>
+          </a:xfrm>
+          <a:prstGeom prst="rect">
+            <a:avLst/>
+          </a:prstGeom>
+          <a:noFill/>
+        </p:spPr>
+        <p:txBody>
+          <a:bodyPr wrap="square">
+            <a:spAutoFit/>
+          </a:bodyPr>
+          <a:lstStyle/>
+          <a:p>
+            <a:pPr>
+              <a:spcAft>
+                <a:spcPts val="400"/>
+              </a:spcAft>
+            </a:pPr>
+            <a:r>
+              <a:rPr sz="1500" b="1">
+                <a:solidFill>
+                  <a:srgbClr val="FFFFFF"/>
+                </a:solidFill>
+                <a:latin typeface="微软雅黑"/>
+                <a:ea typeface="微软雅黑"/>
+                <a:cs typeface="微软雅黑"/>
+              </a:rPr>
+              <a:t>现在你：课后录音发群。再填一张练习纸。不用交本子。</a:t>
+            </a:r>
+          </a:p>
+        </p:txBody>
+      </p:sp>
+    </p:spTree>
+  </p:cSld>
+  <p:clrMapOvr>
+    <a:masterClrMapping/>
+  </p:clrMapOvr>
+</p:sld>
+</file>
+
 <file path=ppt/slides/slide2.xml><?xml version="1.0" encoding="utf-8"?>
 <p:sld xmlns:a="http://schemas.openxmlformats.org/drawingml/2006/main" xmlns:p="http://schemas.openxmlformats.org/presentationml/2006/main" xmlns:r="http://schemas.openxmlformats.org/officeDocument/2006/relationships">
   <p:cSld>
@@ -4100,15 +5290,17 @@
               </a:spcAft>
             </a:pPr>
             <a:r>
-              <a:rPr sz="2200" b="1">
-                <a:solidFill>
-                  <a:srgbClr val="FFFFFF"/>
+              <a:rPr sz="2000" b="0">
+                <a:solidFill>
+                  <a:srgbClr val="212121"/>
                 </a:solidFill>
                 <a:latin typeface="微软雅黑"/>
                 <a:ea typeface="微软雅黑"/>
                 <a:cs typeface="微软雅黑"/>
               </a:rPr>
-              <a:t>找茬挑战　不要闷头互审</a:t>
+              <a:t>不是同桌互相改作业。全班盯下一张「有错的凭证」抢着找。
+写在记录册。1 分钟。找出 2 处 2 分，3 处全对 5 分。
+只认通用记账凭证。下一页就是那张错凭证，不用打开别的文件。</a:t>
             </a:r>
           </a:p>
         </p:txBody>
@@ -4141,7 +5333,7 @@
               </a:spcAft>
             </a:pPr>
             <a:r>
-              <a:rPr sz="2200" b="0">
+              <a:rPr sz="2000" b="0">
                 <a:solidFill>
                   <a:srgbClr val="212121"/>
                 </a:solidFill>
@@ -4149,7 +5341,9 @@
                 <a:ea typeface="微软雅黑"/>
                 <a:cs typeface="微软雅黑"/>
               </a:rPr>
-              <a:t>老师投出一张有错的凭证。全班一起找，写在册子上。</a:t>
+              <a:t>不是同桌互相改作业。全班盯下一张「有错的凭证」抢着找。
+写在记录册。1 分钟。找出 2 处 2 分，3 处全对 5 分。
+只认通用记账凭证。下一页就是那张错凭证，不用打开别的文件。</a:t>
             </a:r>
           </a:p>
           <a:p>
@@ -4167,7 +5361,7 @@
                 <a:ea typeface="微软雅黑"/>
                 <a:cs typeface="微软雅黑"/>
               </a:rPr>
-              <a:t>找出 2 处 2 分，3 处全对 5 分。</a:t>
+              <a:t/>
             </a:r>
           </a:p>
           <a:p>
@@ -4185,7 +5379,7 @@
                 <a:ea typeface="微软雅黑"/>
                 <a:cs typeface="微软雅黑"/>
               </a:rPr>
-              <a:t>详细规则和例题见 90-C14「找茬挑战」。</a:t>
+              <a:t/>
             </a:r>
           </a:p>
         </p:txBody>
@@ -4269,7 +5463,7 @@
                 <a:ea typeface="微软雅黑"/>
                 <a:cs typeface="微软雅黑"/>
               </a:rPr>
-              <a:t>现在你：看这一页。先别写。不用交。不用举手。</a:t>
+              <a:t>现在你：听规则。下一页才是那张错凭证。先别写。</a:t>
             </a:r>
           </a:p>
         </p:txBody>
@@ -4414,7 +5608,7 @@
                 <a:ea typeface="微软雅黑"/>
                 <a:cs typeface="微软雅黑"/>
               </a:rPr>
-              <a:t>课后两件事</a:t>
+              <a:t>先别布置配音</a:t>
             </a:r>
           </a:p>
         </p:txBody>
@@ -4447,7 +5641,7 @@
               </a:spcAft>
             </a:pPr>
             <a:r>
-              <a:rPr sz="2200" b="0">
+              <a:rPr sz="2000" b="0">
                 <a:solidFill>
                   <a:srgbClr val="212121"/>
                 </a:solidFill>
@@ -4455,7 +5649,9 @@
                 <a:ea typeface="微软雅黑"/>
                 <a:cs typeface="微软雅黑"/>
               </a:rPr>
-              <a:t>① 四格连环画配音 40 秒，说清借什么贷什么，发群。只说通用记账凭证。</a:t>
+              <a:t>配音不要现在布置。四格连环画还在后面。
+看到「课后就这一件　四格配音」那一页，再让学生录音。
+现在先做找茬、先看连环画。</a:t>
             </a:r>
           </a:p>
           <a:p>
@@ -4473,7 +5669,7 @@
                 <a:ea typeface="微软雅黑"/>
                 <a:cs typeface="微软雅黑"/>
               </a:rPr>
-              <a:t>② 再填一张电费那笔。审核栏空着。</a:t>
+              <a:t/>
             </a:r>
           </a:p>
           <a:p>
@@ -4491,7 +5687,7 @@
                 <a:ea typeface="微软雅黑"/>
                 <a:cs typeface="微软雅黑"/>
               </a:rPr>
-              <a:t>不用交本子。</a:t>
+              <a:t/>
             </a:r>
           </a:p>
         </p:txBody>
@@ -4575,7 +5771,7 @@
                 <a:ea typeface="微软雅黑"/>
                 <a:cs typeface="微软雅黑"/>
               </a:rPr>
-              <a:t>现在你：课后做绿条说的事。不用交本子。配音发班级群。下节课抽人看册子。</a:t>
+              <a:t>现在你：先做找茬、先看连环画。配音等「课后就这一件」那一页。</a:t>
             </a:r>
           </a:p>
         </p:txBody>
@@ -4846,6 +6042,978 @@
                 <a:cs typeface="微软雅黑"/>
               </a:rPr>
               <a:t>现在你：写下「带红笔」。</a:t>
+            </a:r>
+          </a:p>
+        </p:txBody>
+      </p:sp>
+    </p:spTree>
+  </p:cSld>
+  <p:clrMapOvr>
+    <a:masterClrMapping/>
+  </p:clrMapOvr>
+</p:sld>
+</file>
+
+<file path=ppt/slides/slide7.xml><?xml version="1.0" encoding="utf-8"?>
+<p:sld xmlns:a="http://schemas.openxmlformats.org/drawingml/2006/main" xmlns:p="http://schemas.openxmlformats.org/presentationml/2006/main" xmlns:r="http://schemas.openxmlformats.org/officeDocument/2006/relationships">
+  <p:cSld>
+    <p:spTree>
+      <p:nvGrpSpPr>
+        <p:cNvPr id="1" name=""/>
+        <p:cNvGrpSpPr/>
+        <p:nvPr/>
+      </p:nvGrpSpPr>
+      <p:grpSpPr/>
+      <p:sp>
+        <p:nvSpPr>
+          <p:cNvPr id="2" name="Rectangle 1"/>
+          <p:cNvSpPr/>
+          <p:nvPr/>
+        </p:nvSpPr>
+        <p:spPr>
+          <a:xfrm>
+            <a:off x="0" y="0"/>
+            <a:ext cx="12191695" cy="6858000"/>
+          </a:xfrm>
+          <a:prstGeom prst="rect">
+            <a:avLst/>
+          </a:prstGeom>
+          <a:solidFill>
+            <a:srgbClr val="FFF8E1"/>
+          </a:solidFill>
+          <a:ln>
+            <a:noFill/>
+          </a:ln>
+        </p:spPr>
+        <p:style>
+          <a:lnRef idx="1">
+            <a:schemeClr val="accent1"/>
+          </a:lnRef>
+          <a:fillRef idx="3">
+            <a:schemeClr val="accent1"/>
+          </a:fillRef>
+          <a:effectRef idx="2">
+            <a:schemeClr val="accent1"/>
+          </a:effectRef>
+          <a:fontRef idx="minor">
+            <a:schemeClr val="lt1"/>
+          </a:fontRef>
+        </p:style>
+        <p:txBody>
+          <a:bodyPr rtlCol="0" anchor="ctr"/>
+          <a:lstStyle/>
+          <a:p>
+            <a:pPr algn="ctr"/>
+          </a:p>
+        </p:txBody>
+      </p:sp>
+      <p:sp>
+        <p:nvSpPr>
+          <p:cNvPr id="3" name="Rectangle 2"/>
+          <p:cNvSpPr/>
+          <p:nvPr/>
+        </p:nvSpPr>
+        <p:spPr>
+          <a:xfrm>
+            <a:off x="0" y="0"/>
+            <a:ext cx="12191695" cy="749808"/>
+          </a:xfrm>
+          <a:prstGeom prst="rect">
+            <a:avLst/>
+          </a:prstGeom>
+          <a:solidFill>
+            <a:srgbClr val="BF360C"/>
+          </a:solidFill>
+          <a:ln>
+            <a:noFill/>
+          </a:ln>
+        </p:spPr>
+        <p:style>
+          <a:lnRef idx="1">
+            <a:schemeClr val="accent1"/>
+          </a:lnRef>
+          <a:fillRef idx="3">
+            <a:schemeClr val="accent1"/>
+          </a:fillRef>
+          <a:effectRef idx="2">
+            <a:schemeClr val="accent1"/>
+          </a:effectRef>
+          <a:fontRef idx="minor">
+            <a:schemeClr val="lt1"/>
+          </a:fontRef>
+        </p:style>
+        <p:txBody>
+          <a:bodyPr rtlCol="0" anchor="ctr"/>
+          <a:lstStyle/>
+          <a:p>
+            <a:pPr algn="ctr"/>
+          </a:p>
+        </p:txBody>
+      </p:sp>
+      <p:sp>
+        <p:nvSpPr>
+          <p:cNvPr id="4" name="TextBox 3"/>
+          <p:cNvSpPr txBox="1"/>
+          <p:nvPr/>
+        </p:nvSpPr>
+        <p:spPr>
+          <a:xfrm>
+            <a:off x="274320" y="128016"/>
+            <a:ext cx="11612880" cy="512064"/>
+          </a:xfrm>
+          <a:prstGeom prst="rect">
+            <a:avLst/>
+          </a:prstGeom>
+          <a:noFill/>
+        </p:spPr>
+        <p:txBody>
+          <a:bodyPr wrap="square">
+            <a:spAutoFit/>
+          </a:bodyPr>
+          <a:lstStyle/>
+          <a:p>
+            <a:pPr>
+              <a:spcAft>
+                <a:spcPts val="400"/>
+              </a:spcAft>
+            </a:pPr>
+            <a:r>
+              <a:rPr sz="2200" b="1">
+                <a:solidFill>
+                  <a:srgbClr val="FFFFFF"/>
+                </a:solidFill>
+                <a:latin typeface="微软雅黑"/>
+                <a:ea typeface="微软雅黑"/>
+                <a:cs typeface="微软雅黑"/>
+              </a:rPr>
+              <a:t>找茬　这张通用记账凭证有 3 处错</a:t>
+            </a:r>
+          </a:p>
+        </p:txBody>
+      </p:sp>
+      <p:sp>
+        <p:nvSpPr>
+          <p:cNvPr id="5" name="TextBox 4"/>
+          <p:cNvSpPr txBox="1"/>
+          <p:nvPr/>
+        </p:nvSpPr>
+        <p:spPr>
+          <a:xfrm>
+            <a:off x="457200" y="960120"/>
+            <a:ext cx="11247120" cy="4754880"/>
+          </a:xfrm>
+          <a:prstGeom prst="rect">
+            <a:avLst/>
+          </a:prstGeom>
+          <a:noFill/>
+        </p:spPr>
+        <p:txBody>
+          <a:bodyPr wrap="square">
+            <a:spAutoFit/>
+          </a:bodyPr>
+          <a:lstStyle/>
+          <a:p>
+            <a:pPr>
+              <a:spcAft>
+                <a:spcPts val="400"/>
+              </a:spcAft>
+            </a:pPr>
+            <a:r>
+              <a:rPr sz="2200" b="0">
+                <a:solidFill>
+                  <a:srgbClr val="212121"/>
+                </a:solidFill>
+                <a:latin typeface="微软雅黑"/>
+                <a:ea typeface="微软雅黑"/>
+                <a:cs typeface="微软雅黑"/>
+              </a:rPr>
+              <a:t>日期：2026年3月15日　　记字第 3 号</a:t>
+            </a:r>
+          </a:p>
+          <a:p>
+            <a:pPr>
+              <a:spcAft>
+                <a:spcPts val="400"/>
+              </a:spcAft>
+            </a:pPr>
+            <a:r>
+              <a:rPr sz="2200" b="0">
+                <a:solidFill>
+                  <a:srgbClr val="212121"/>
+                </a:solidFill>
+                <a:latin typeface="微软雅黑"/>
+                <a:ea typeface="微软雅黑"/>
+                <a:cs typeface="微软雅黑"/>
+              </a:rPr>
+              <a:t>摘要：付电费</a:t>
+            </a:r>
+          </a:p>
+          <a:p>
+            <a:pPr>
+              <a:spcAft>
+                <a:spcPts val="400"/>
+              </a:spcAft>
+            </a:pPr>
+            <a:r>
+              <a:rPr sz="2200" b="0">
+                <a:solidFill>
+                  <a:srgbClr val="212121"/>
+                </a:solidFill>
+                <a:latin typeface="微软雅黑"/>
+                <a:ea typeface="微软雅黑"/>
+                <a:cs typeface="微软雅黑"/>
+              </a:rPr>
+              <a:t>借：管理费用　　800</a:t>
+            </a:r>
+          </a:p>
+          <a:p>
+            <a:pPr>
+              <a:spcAft>
+                <a:spcPts val="400"/>
+              </a:spcAft>
+            </a:pPr>
+            <a:r>
+              <a:rPr sz="2200" b="0">
+                <a:solidFill>
+                  <a:srgbClr val="212121"/>
+                </a:solidFill>
+                <a:latin typeface="微软雅黑"/>
+                <a:ea typeface="微软雅黑"/>
+                <a:cs typeface="微软雅黑"/>
+              </a:rPr>
+              <a:t>贷：库存现金　　800</a:t>
+            </a:r>
+          </a:p>
+          <a:p>
+            <a:pPr>
+              <a:spcAft>
+                <a:spcPts val="400"/>
+              </a:spcAft>
+            </a:pPr>
+            <a:r>
+              <a:rPr sz="2200" b="0">
+                <a:solidFill>
+                  <a:srgbClr val="212121"/>
+                </a:solidFill>
+                <a:latin typeface="微软雅黑"/>
+                <a:ea typeface="微软雅黑"/>
+                <a:cs typeface="微软雅黑"/>
+              </a:rPr>
+              <a:t>附件：0 张　　制单：张三　　审核：张三</a:t>
+            </a:r>
+          </a:p>
+          <a:p>
+            <a:pPr>
+              <a:spcAft>
+                <a:spcPts val="400"/>
+              </a:spcAft>
+            </a:pPr>
+            <a:r>
+              <a:rPr sz="2200" b="0">
+                <a:solidFill>
+                  <a:srgbClr val="212121"/>
+                </a:solidFill>
+                <a:latin typeface="微软雅黑"/>
+                <a:ea typeface="微软雅黑"/>
+                <a:cs typeface="微软雅黑"/>
+              </a:rPr>
+              <a:t>题目其实是：用银行存款支付本月电费 800 元。</a:t>
+            </a:r>
+          </a:p>
+        </p:txBody>
+      </p:sp>
+      <p:sp>
+        <p:nvSpPr>
+          <p:cNvPr id="6" name="Rectangle 5"/>
+          <p:cNvSpPr/>
+          <p:nvPr/>
+        </p:nvSpPr>
+        <p:spPr>
+          <a:xfrm>
+            <a:off x="0" y="5897880"/>
+            <a:ext cx="12191695" cy="960120"/>
+          </a:xfrm>
+          <a:prstGeom prst="rect">
+            <a:avLst/>
+          </a:prstGeom>
+          <a:solidFill>
+            <a:srgbClr val="2E7D32"/>
+          </a:solidFill>
+          <a:ln>
+            <a:noFill/>
+          </a:ln>
+        </p:spPr>
+        <p:style>
+          <a:lnRef idx="1">
+            <a:schemeClr val="accent1"/>
+          </a:lnRef>
+          <a:fillRef idx="3">
+            <a:schemeClr val="accent1"/>
+          </a:fillRef>
+          <a:effectRef idx="2">
+            <a:schemeClr val="accent1"/>
+          </a:effectRef>
+          <a:fontRef idx="minor">
+            <a:schemeClr val="lt1"/>
+          </a:fontRef>
+        </p:style>
+        <p:txBody>
+          <a:bodyPr rtlCol="0" anchor="ctr"/>
+          <a:lstStyle/>
+          <a:p>
+            <a:pPr algn="ctr"/>
+          </a:p>
+        </p:txBody>
+      </p:sp>
+      <p:sp>
+        <p:nvSpPr>
+          <p:cNvPr id="7" name="TextBox 6"/>
+          <p:cNvSpPr txBox="1"/>
+          <p:nvPr/>
+        </p:nvSpPr>
+        <p:spPr>
+          <a:xfrm>
+            <a:off x="274320" y="5961888"/>
+            <a:ext cx="11612880" cy="841248"/>
+          </a:xfrm>
+          <a:prstGeom prst="rect">
+            <a:avLst/>
+          </a:prstGeom>
+          <a:noFill/>
+        </p:spPr>
+        <p:txBody>
+          <a:bodyPr wrap="square">
+            <a:spAutoFit/>
+          </a:bodyPr>
+          <a:lstStyle/>
+          <a:p>
+            <a:pPr>
+              <a:spcAft>
+                <a:spcPts val="400"/>
+              </a:spcAft>
+            </a:pPr>
+            <a:r>
+              <a:rPr sz="1500" b="1">
+                <a:solidFill>
+                  <a:srgbClr val="FFFFFF"/>
+                </a:solidFill>
+                <a:latin typeface="微软雅黑"/>
+                <a:ea typeface="微软雅黑"/>
+                <a:cs typeface="微软雅黑"/>
+              </a:rPr>
+              <a:t>现在你：写在册子上，哪三处错。1 分钟。不用交。抽到再举册子。</a:t>
+            </a:r>
+          </a:p>
+        </p:txBody>
+      </p:sp>
+    </p:spTree>
+  </p:cSld>
+  <p:clrMapOvr>
+    <a:masterClrMapping/>
+  </p:clrMapOvr>
+</p:sld>
+</file>
+
+<file path=ppt/slides/slide8.xml><?xml version="1.0" encoding="utf-8"?>
+<p:sld xmlns:a="http://schemas.openxmlformats.org/drawingml/2006/main" xmlns:p="http://schemas.openxmlformats.org/presentationml/2006/main" xmlns:r="http://schemas.openxmlformats.org/officeDocument/2006/relationships">
+  <p:cSld>
+    <p:spTree>
+      <p:nvGrpSpPr>
+        <p:cNvPr id="1" name=""/>
+        <p:cNvGrpSpPr/>
+        <p:nvPr/>
+      </p:nvGrpSpPr>
+      <p:grpSpPr/>
+      <p:sp>
+        <p:nvSpPr>
+          <p:cNvPr id="2" name="Rectangle 1"/>
+          <p:cNvSpPr/>
+          <p:nvPr/>
+        </p:nvSpPr>
+        <p:spPr>
+          <a:xfrm>
+            <a:off x="0" y="0"/>
+            <a:ext cx="12191695" cy="6858000"/>
+          </a:xfrm>
+          <a:prstGeom prst="rect">
+            <a:avLst/>
+          </a:prstGeom>
+          <a:solidFill>
+            <a:srgbClr val="FFF8E1"/>
+          </a:solidFill>
+          <a:ln>
+            <a:noFill/>
+          </a:ln>
+        </p:spPr>
+        <p:style>
+          <a:lnRef idx="1">
+            <a:schemeClr val="accent1"/>
+          </a:lnRef>
+          <a:fillRef idx="3">
+            <a:schemeClr val="accent1"/>
+          </a:fillRef>
+          <a:effectRef idx="2">
+            <a:schemeClr val="accent1"/>
+          </a:effectRef>
+          <a:fontRef idx="minor">
+            <a:schemeClr val="lt1"/>
+          </a:fontRef>
+        </p:style>
+        <p:txBody>
+          <a:bodyPr rtlCol="0" anchor="ctr"/>
+          <a:lstStyle/>
+          <a:p>
+            <a:pPr algn="ctr"/>
+          </a:p>
+        </p:txBody>
+      </p:sp>
+      <p:sp>
+        <p:nvSpPr>
+          <p:cNvPr id="3" name="Rectangle 2"/>
+          <p:cNvSpPr/>
+          <p:nvPr/>
+        </p:nvSpPr>
+        <p:spPr>
+          <a:xfrm>
+            <a:off x="0" y="0"/>
+            <a:ext cx="12191695" cy="749808"/>
+          </a:xfrm>
+          <a:prstGeom prst="rect">
+            <a:avLst/>
+          </a:prstGeom>
+          <a:solidFill>
+            <a:srgbClr val="F9A825"/>
+          </a:solidFill>
+          <a:ln>
+            <a:noFill/>
+          </a:ln>
+        </p:spPr>
+        <p:style>
+          <a:lnRef idx="1">
+            <a:schemeClr val="accent1"/>
+          </a:lnRef>
+          <a:fillRef idx="3">
+            <a:schemeClr val="accent1"/>
+          </a:fillRef>
+          <a:effectRef idx="2">
+            <a:schemeClr val="accent1"/>
+          </a:effectRef>
+          <a:fontRef idx="minor">
+            <a:schemeClr val="lt1"/>
+          </a:fontRef>
+        </p:style>
+        <p:txBody>
+          <a:bodyPr rtlCol="0" anchor="ctr"/>
+          <a:lstStyle/>
+          <a:p>
+            <a:pPr algn="ctr"/>
+          </a:p>
+        </p:txBody>
+      </p:sp>
+      <p:sp>
+        <p:nvSpPr>
+          <p:cNvPr id="4" name="TextBox 3"/>
+          <p:cNvSpPr txBox="1"/>
+          <p:nvPr/>
+        </p:nvSpPr>
+        <p:spPr>
+          <a:xfrm>
+            <a:off x="274320" y="128016"/>
+            <a:ext cx="11612880" cy="512064"/>
+          </a:xfrm>
+          <a:prstGeom prst="rect">
+            <a:avLst/>
+          </a:prstGeom>
+          <a:noFill/>
+        </p:spPr>
+        <p:txBody>
+          <a:bodyPr wrap="square">
+            <a:spAutoFit/>
+          </a:bodyPr>
+          <a:lstStyle/>
+          <a:p>
+            <a:pPr>
+              <a:spcAft>
+                <a:spcPts val="400"/>
+              </a:spcAft>
+            </a:pPr>
+            <a:r>
+              <a:rPr sz="2200" b="1">
+                <a:solidFill>
+                  <a:srgbClr val="FFFFFF"/>
+                </a:solidFill>
+                <a:latin typeface="微软雅黑"/>
+                <a:ea typeface="微软雅黑"/>
+                <a:cs typeface="微软雅黑"/>
+              </a:rPr>
+              <a:t>揭晓　三处错</a:t>
+            </a:r>
+          </a:p>
+        </p:txBody>
+      </p:sp>
+      <p:sp>
+        <p:nvSpPr>
+          <p:cNvPr id="5" name="TextBox 4"/>
+          <p:cNvSpPr txBox="1"/>
+          <p:nvPr/>
+        </p:nvSpPr>
+        <p:spPr>
+          <a:xfrm>
+            <a:off x="457200" y="960120"/>
+            <a:ext cx="11247120" cy="4754880"/>
+          </a:xfrm>
+          <a:prstGeom prst="rect">
+            <a:avLst/>
+          </a:prstGeom>
+          <a:noFill/>
+        </p:spPr>
+        <p:txBody>
+          <a:bodyPr wrap="square">
+            <a:spAutoFit/>
+          </a:bodyPr>
+          <a:lstStyle/>
+          <a:p>
+            <a:pPr>
+              <a:spcAft>
+                <a:spcPts val="400"/>
+              </a:spcAft>
+            </a:pPr>
+            <a:r>
+              <a:rPr sz="2200" b="0">
+                <a:solidFill>
+                  <a:srgbClr val="212121"/>
+                </a:solidFill>
+                <a:latin typeface="微软雅黑"/>
+                <a:ea typeface="微软雅黑"/>
+                <a:cs typeface="微软雅黑"/>
+              </a:rPr>
+              <a:t>1. 贷方写成了库存现金，应是银行存款。</a:t>
+            </a:r>
+          </a:p>
+          <a:p>
+            <a:pPr>
+              <a:spcAft>
+                <a:spcPts val="400"/>
+              </a:spcAft>
+            </a:pPr>
+            <a:r>
+              <a:rPr sz="2200" b="0">
+                <a:solidFill>
+                  <a:srgbClr val="212121"/>
+                </a:solidFill>
+                <a:latin typeface="微软雅黑"/>
+                <a:ea typeface="微软雅黑"/>
+                <a:cs typeface="微软雅黑"/>
+              </a:rPr>
+              <a:t>2. 附件写成 0，电费单至少 1 张。</a:t>
+            </a:r>
+          </a:p>
+          <a:p>
+            <a:pPr>
+              <a:spcAft>
+                <a:spcPts val="400"/>
+              </a:spcAft>
+            </a:pPr>
+            <a:r>
+              <a:rPr sz="2200" b="0">
+                <a:solidFill>
+                  <a:srgbClr val="212121"/>
+                </a:solidFill>
+                <a:latin typeface="微软雅黑"/>
+                <a:ea typeface="微软雅黑"/>
+                <a:cs typeface="微软雅黑"/>
+              </a:rPr>
+              <a:t>3. 审核栏签了自己的名，自己填的自己不能审。</a:t>
+            </a:r>
+          </a:p>
+        </p:txBody>
+      </p:sp>
+      <p:sp>
+        <p:nvSpPr>
+          <p:cNvPr id="6" name="Rectangle 5"/>
+          <p:cNvSpPr/>
+          <p:nvPr/>
+        </p:nvSpPr>
+        <p:spPr>
+          <a:xfrm>
+            <a:off x="0" y="5897880"/>
+            <a:ext cx="12191695" cy="960120"/>
+          </a:xfrm>
+          <a:prstGeom prst="rect">
+            <a:avLst/>
+          </a:prstGeom>
+          <a:solidFill>
+            <a:srgbClr val="2E7D32"/>
+          </a:solidFill>
+          <a:ln>
+            <a:noFill/>
+          </a:ln>
+        </p:spPr>
+        <p:style>
+          <a:lnRef idx="1">
+            <a:schemeClr val="accent1"/>
+          </a:lnRef>
+          <a:fillRef idx="3">
+            <a:schemeClr val="accent1"/>
+          </a:fillRef>
+          <a:effectRef idx="2">
+            <a:schemeClr val="accent1"/>
+          </a:effectRef>
+          <a:fontRef idx="minor">
+            <a:schemeClr val="lt1"/>
+          </a:fontRef>
+        </p:style>
+        <p:txBody>
+          <a:bodyPr rtlCol="0" anchor="ctr"/>
+          <a:lstStyle/>
+          <a:p>
+            <a:pPr algn="ctr"/>
+          </a:p>
+        </p:txBody>
+      </p:sp>
+      <p:sp>
+        <p:nvSpPr>
+          <p:cNvPr id="7" name="TextBox 6"/>
+          <p:cNvSpPr txBox="1"/>
+          <p:nvPr/>
+        </p:nvSpPr>
+        <p:spPr>
+          <a:xfrm>
+            <a:off x="274320" y="5961888"/>
+            <a:ext cx="11612880" cy="841248"/>
+          </a:xfrm>
+          <a:prstGeom prst="rect">
+            <a:avLst/>
+          </a:prstGeom>
+          <a:noFill/>
+        </p:spPr>
+        <p:txBody>
+          <a:bodyPr wrap="square">
+            <a:spAutoFit/>
+          </a:bodyPr>
+          <a:lstStyle/>
+          <a:p>
+            <a:pPr>
+              <a:spcAft>
+                <a:spcPts val="400"/>
+              </a:spcAft>
+            </a:pPr>
+            <a:r>
+              <a:rPr sz="1500" b="1">
+                <a:solidFill>
+                  <a:srgbClr val="FFFFFF"/>
+                </a:solidFill>
+                <a:latin typeface="微软雅黑"/>
+                <a:ea typeface="微软雅黑"/>
+                <a:cs typeface="微软雅黑"/>
+              </a:rPr>
+              <a:t>现在你：对照册子，改在旁边。不用交。</a:t>
+            </a:r>
+          </a:p>
+        </p:txBody>
+      </p:sp>
+    </p:spTree>
+  </p:cSld>
+  <p:clrMapOvr>
+    <a:masterClrMapping/>
+  </p:clrMapOvr>
+</p:sld>
+</file>
+
+<file path=ppt/slides/slide9.xml><?xml version="1.0" encoding="utf-8"?>
+<p:sld xmlns:a="http://schemas.openxmlformats.org/drawingml/2006/main" xmlns:p="http://schemas.openxmlformats.org/presentationml/2006/main" xmlns:r="http://schemas.openxmlformats.org/officeDocument/2006/relationships">
+  <p:cSld>
+    <p:spTree>
+      <p:nvGrpSpPr>
+        <p:cNvPr id="1" name=""/>
+        <p:cNvGrpSpPr/>
+        <p:nvPr/>
+      </p:nvGrpSpPr>
+      <p:grpSpPr/>
+      <p:sp>
+        <p:nvSpPr>
+          <p:cNvPr id="2" name="Rectangle 1"/>
+          <p:cNvSpPr/>
+          <p:nvPr/>
+        </p:nvSpPr>
+        <p:spPr>
+          <a:xfrm>
+            <a:off x="0" y="0"/>
+            <a:ext cx="12191695" cy="6858000"/>
+          </a:xfrm>
+          <a:prstGeom prst="rect">
+            <a:avLst/>
+          </a:prstGeom>
+          <a:solidFill>
+            <a:srgbClr val="E3F2FD"/>
+          </a:solidFill>
+          <a:ln>
+            <a:noFill/>
+          </a:ln>
+        </p:spPr>
+        <p:style>
+          <a:lnRef idx="1">
+            <a:schemeClr val="accent1"/>
+          </a:lnRef>
+          <a:fillRef idx="3">
+            <a:schemeClr val="accent1"/>
+          </a:fillRef>
+          <a:effectRef idx="2">
+            <a:schemeClr val="accent1"/>
+          </a:effectRef>
+          <a:fontRef idx="minor">
+            <a:schemeClr val="lt1"/>
+          </a:fontRef>
+        </p:style>
+        <p:txBody>
+          <a:bodyPr rtlCol="0" anchor="ctr"/>
+          <a:lstStyle/>
+          <a:p>
+            <a:pPr algn="ctr"/>
+          </a:p>
+        </p:txBody>
+      </p:sp>
+      <p:sp>
+        <p:nvSpPr>
+          <p:cNvPr id="3" name="Rectangle 2"/>
+          <p:cNvSpPr/>
+          <p:nvPr/>
+        </p:nvSpPr>
+        <p:spPr>
+          <a:xfrm>
+            <a:off x="0" y="0"/>
+            <a:ext cx="12191695" cy="749808"/>
+          </a:xfrm>
+          <a:prstGeom prst="rect">
+            <a:avLst/>
+          </a:prstGeom>
+          <a:solidFill>
+            <a:srgbClr val="BF360C"/>
+          </a:solidFill>
+          <a:ln>
+            <a:noFill/>
+          </a:ln>
+        </p:spPr>
+        <p:style>
+          <a:lnRef idx="1">
+            <a:schemeClr val="accent1"/>
+          </a:lnRef>
+          <a:fillRef idx="3">
+            <a:schemeClr val="accent1"/>
+          </a:fillRef>
+          <a:effectRef idx="2">
+            <a:schemeClr val="accent1"/>
+          </a:effectRef>
+          <a:fontRef idx="minor">
+            <a:schemeClr val="lt1"/>
+          </a:fontRef>
+        </p:style>
+        <p:txBody>
+          <a:bodyPr rtlCol="0" anchor="ctr"/>
+          <a:lstStyle/>
+          <a:p>
+            <a:pPr algn="ctr"/>
+          </a:p>
+        </p:txBody>
+      </p:sp>
+      <p:sp>
+        <p:nvSpPr>
+          <p:cNvPr id="4" name="TextBox 3"/>
+          <p:cNvSpPr txBox="1"/>
+          <p:nvPr/>
+        </p:nvSpPr>
+        <p:spPr>
+          <a:xfrm>
+            <a:off x="274320" y="128016"/>
+            <a:ext cx="11612880" cy="512064"/>
+          </a:xfrm>
+          <a:prstGeom prst="rect">
+            <a:avLst/>
+          </a:prstGeom>
+          <a:noFill/>
+        </p:spPr>
+        <p:txBody>
+          <a:bodyPr wrap="square">
+            <a:spAutoFit/>
+          </a:bodyPr>
+          <a:lstStyle/>
+          <a:p>
+            <a:pPr>
+              <a:spcAft>
+                <a:spcPts val="400"/>
+              </a:spcAft>
+            </a:pPr>
+            <a:r>
+              <a:rPr sz="2200" b="1">
+                <a:solidFill>
+                  <a:srgbClr val="FFFFFF"/>
+                </a:solidFill>
+                <a:latin typeface="微软雅黑"/>
+                <a:ea typeface="微软雅黑"/>
+                <a:cs typeface="微软雅黑"/>
+              </a:rPr>
+              <a:t>四格连环画　先看完再配音</a:t>
+            </a:r>
+          </a:p>
+        </p:txBody>
+      </p:sp>
+      <p:sp>
+        <p:nvSpPr>
+          <p:cNvPr id="5" name="TextBox 4"/>
+          <p:cNvSpPr txBox="1"/>
+          <p:nvPr/>
+        </p:nvSpPr>
+        <p:spPr>
+          <a:xfrm>
+            <a:off x="457200" y="960120"/>
+            <a:ext cx="11247120" cy="4754880"/>
+          </a:xfrm>
+          <a:prstGeom prst="rect">
+            <a:avLst/>
+          </a:prstGeom>
+          <a:noFill/>
+        </p:spPr>
+        <p:txBody>
+          <a:bodyPr wrap="square">
+            <a:spAutoFit/>
+          </a:bodyPr>
+          <a:lstStyle/>
+          <a:p>
+            <a:pPr>
+              <a:spcAft>
+                <a:spcPts val="400"/>
+              </a:spcAft>
+            </a:pPr>
+            <a:r>
+              <a:rPr sz="2200" b="0">
+                <a:solidFill>
+                  <a:srgbClr val="212121"/>
+                </a:solidFill>
+                <a:latin typeface="微软雅黑"/>
+                <a:ea typeface="微软雅黑"/>
+                <a:cs typeface="微软雅黑"/>
+              </a:rPr>
+              <a:t>下面四格：收到发票 → 想科目 → 填凭证 → 钉在一起。</a:t>
+            </a:r>
+          </a:p>
+          <a:p>
+            <a:pPr>
+              <a:spcAft>
+                <a:spcPts val="400"/>
+              </a:spcAft>
+            </a:pPr>
+            <a:r>
+              <a:rPr sz="2200" b="0">
+                <a:solidFill>
+                  <a:srgbClr val="212121"/>
+                </a:solidFill>
+                <a:latin typeface="微软雅黑"/>
+                <a:ea typeface="微软雅黑"/>
+                <a:cs typeface="微软雅黑"/>
+              </a:rPr>
+              <a:t>这一节课先看、先听老师讲。</a:t>
+            </a:r>
+          </a:p>
+          <a:p>
+            <a:pPr>
+              <a:spcAft>
+                <a:spcPts val="400"/>
+              </a:spcAft>
+            </a:pPr>
+            <a:r>
+              <a:rPr sz="2200" b="0">
+                <a:solidFill>
+                  <a:srgbClr val="212121"/>
+                </a:solidFill>
+                <a:latin typeface="微软雅黑"/>
+                <a:ea typeface="微软雅黑"/>
+                <a:cs typeface="微软雅黑"/>
+              </a:rPr>
+              <a:t>课后任务在四格全部看完之后的那一页，现在先别录音。</a:t>
+            </a:r>
+          </a:p>
+        </p:txBody>
+      </p:sp>
+      <p:sp>
+        <p:nvSpPr>
+          <p:cNvPr id="6" name="Rectangle 5"/>
+          <p:cNvSpPr/>
+          <p:nvPr/>
+        </p:nvSpPr>
+        <p:spPr>
+          <a:xfrm>
+            <a:off x="0" y="5897880"/>
+            <a:ext cx="12191695" cy="960120"/>
+          </a:xfrm>
+          <a:prstGeom prst="rect">
+            <a:avLst/>
+          </a:prstGeom>
+          <a:solidFill>
+            <a:srgbClr val="2E7D32"/>
+          </a:solidFill>
+          <a:ln>
+            <a:noFill/>
+          </a:ln>
+        </p:spPr>
+        <p:style>
+          <a:lnRef idx="1">
+            <a:schemeClr val="accent1"/>
+          </a:lnRef>
+          <a:fillRef idx="3">
+            <a:schemeClr val="accent1"/>
+          </a:fillRef>
+          <a:effectRef idx="2">
+            <a:schemeClr val="accent1"/>
+          </a:effectRef>
+          <a:fontRef idx="minor">
+            <a:schemeClr val="lt1"/>
+          </a:fontRef>
+        </p:style>
+        <p:txBody>
+          <a:bodyPr rtlCol="0" anchor="ctr"/>
+          <a:lstStyle/>
+          <a:p>
+            <a:pPr algn="ctr"/>
+          </a:p>
+        </p:txBody>
+      </p:sp>
+      <p:sp>
+        <p:nvSpPr>
+          <p:cNvPr id="7" name="TextBox 6"/>
+          <p:cNvSpPr txBox="1"/>
+          <p:nvPr/>
+        </p:nvSpPr>
+        <p:spPr>
+          <a:xfrm>
+            <a:off x="274320" y="5961888"/>
+            <a:ext cx="11612880" cy="841248"/>
+          </a:xfrm>
+          <a:prstGeom prst="rect">
+            <a:avLst/>
+          </a:prstGeom>
+          <a:noFill/>
+        </p:spPr>
+        <p:txBody>
+          <a:bodyPr wrap="square">
+            <a:spAutoFit/>
+          </a:bodyPr>
+          <a:lstStyle/>
+          <a:p>
+            <a:pPr>
+              <a:spcAft>
+                <a:spcPts val="400"/>
+              </a:spcAft>
+            </a:pPr>
+            <a:r>
+              <a:rPr sz="1500" b="1">
+                <a:solidFill>
+                  <a:srgbClr val="FFFFFF"/>
+                </a:solidFill>
+                <a:latin typeface="微软雅黑"/>
+                <a:ea typeface="微软雅黑"/>
+                <a:cs typeface="微软雅黑"/>
+              </a:rPr>
+              <a:t>现在你：看图听老师。先别录音。</a:t>
             </a:r>
           </a:p>
         </p:txBody>

--- a/04_项目四_填制和审核会计凭证/04-00_项目四_上课投影_v1.0_20260821.pptx
+++ b/04_项目四_填制和审核会计凭证/04-00_项目四_上课投影_v1.0_20260821.pptx
@@ -4303,8 +4303,8 @@
         </p:nvSpPr>
         <p:spPr>
           <a:xfrm>
-            <a:off x="457200" y="960120"/>
-            <a:ext cx="11247120" cy="4754880"/>
+            <a:off x="228600" y="713232"/>
+            <a:ext cx="11704320" cy="1554480"/>
           </a:xfrm>
           <a:prstGeom prst="rect">
             <a:avLst/>
@@ -4331,7 +4331,7 @@
                 <a:ea typeface="微软雅黑"/>
                 <a:cs typeface="微软雅黑"/>
               </a:rPr>
-              <a:t>把刚才四格按顺序配音，总共大约 40 秒，发班级群。</a:t>
+              <a:t>做什么：对着下面四格按顺序讲大约 40 秒，发班级群。</a:t>
             </a:r>
           </a:p>
           <a:p>
@@ -4349,7 +4349,7 @@
                 <a:ea typeface="微软雅黑"/>
                 <a:cs typeface="微软雅黑"/>
               </a:rPr>
-              <a:t>必须说出：借哪个科目、贷哪个科目、金额多少。</a:t>
+              <a:t>为什么：能用嘴说出一张完整的凭证——借什么、贷什么、多少钱，发票怎么变成记账凭证。</a:t>
             </a:r>
           </a:p>
           <a:p>
@@ -4367,7 +4367,7 @@
                 <a:ea typeface="微软雅黑"/>
                 <a:cs typeface="微软雅黑"/>
               </a:rPr>
-              <a:t>只说「记账凭证」。不要说收款凭证、付款凭证、转账凭证。</a:t>
+              <a:t>怎么讲：①拿到发票先审  ②想借哪个贷哪个  ③填到记账凭证上  ④发票钉在凭证后面。必须说出借哪个、贷哪个、金额多少。</a:t>
             </a:r>
           </a:p>
           <a:p>
@@ -4385,25 +4385,7 @@
                 <a:ea typeface="微软雅黑"/>
                 <a:cs typeface="微软雅黑"/>
               </a:rPr>
-              <a:t>交了 2 分。科目和借贷都说对 5 分。</a:t>
-            </a:r>
-          </a:p>
-          <a:p>
-            <a:pPr>
-              <a:spcAft>
-                <a:spcPts val="400"/>
-              </a:spcAft>
-            </a:pPr>
-            <a:r>
-              <a:rPr sz="2200" b="0">
-                <a:solidFill>
-                  <a:srgbClr val="212121"/>
-                </a:solidFill>
-                <a:latin typeface="微软雅黑"/>
-                <a:ea typeface="微软雅黑"/>
-                <a:cs typeface="微软雅黑"/>
-              </a:rPr>
-              <a:t>另外：练习纸再填一张电费 800。审核栏空着。不用交本子。</a:t>
+              <a:t>做完：发班级群。交了 2 分，科目和借贷都说对 5 分。另外：练习纸再填一张电费 800。审核栏空着。不用交本子。</a:t>
             </a:r>
           </a:p>
         </p:txBody>
@@ -4487,7 +4469,247 @@
                 <a:ea typeface="微软雅黑"/>
                 <a:cs typeface="微软雅黑"/>
               </a:rPr>
-              <a:t>现在你：课后录音发群。再填一张练习纸。不用交本子。</a:t>
+              <a:t>现在你：课后对着下面四格录音发群。再填一张练习纸。不用交本子。</a:t>
+            </a:r>
+          </a:p>
+        </p:txBody>
+      </p:sp>
+      <p:pic>
+        <p:nvPicPr>
+          <p:cNvPr id="8" name="Picture 7" descr="image.jpg"/>
+          <p:cNvPicPr>
+            <a:picLocks noChangeAspect="1"/>
+          </p:cNvPicPr>
+          <p:nvPr/>
+        </p:nvPicPr>
+        <p:blipFill>
+          <a:blip r:embed="rId2"/>
+          <a:stretch>
+            <a:fillRect/>
+          </a:stretch>
+        </p:blipFill>
+        <p:spPr>
+          <a:xfrm>
+            <a:off x="256032" y="2400000"/>
+            <a:ext cx="2788920" cy="2200000"/>
+          </a:xfrm>
+          <a:prstGeom prst="rect">
+            <a:avLst/>
+          </a:prstGeom>
+        </p:spPr>
+      </p:pic>
+      <p:sp>
+        <p:nvSpPr>
+          <p:cNvPr id="9" name="TextBox 8"/>
+          <p:cNvSpPr txBox="1"/>
+          <p:nvPr/>
+        </p:nvSpPr>
+        <p:spPr>
+          <a:xfrm>
+            <a:off x="256032" y="4620000"/>
+            <a:ext cx="2788920" cy="292608"/>
+          </a:xfrm>
+          <a:prstGeom prst="rect">
+            <a:avLst/>
+          </a:prstGeom>
+          <a:noFill/>
+        </p:spPr>
+        <p:txBody>
+          <a:bodyPr wrap="square">
+            <a:spAutoFit/>
+          </a:bodyPr>
+          <a:lstStyle/>
+          <a:p>
+            <a:pPr algn="ctr"/>
+            <a:r>
+              <a:rPr sz="1400" b="1">
+                <a:solidFill>
+                  <a:srgbClr val="212121"/>
+                </a:solidFill>
+                <a:latin typeface="微软雅黑"/>
+                <a:ea typeface="微软雅黑"/>
+              </a:rPr>
+              <a:t>1 拿到发票</a:t>
+            </a:r>
+          </a:p>
+        </p:txBody>
+      </p:sp>
+      <p:pic>
+        <p:nvPicPr>
+          <p:cNvPr id="10" name="Picture 9" descr="image.jpg"/>
+          <p:cNvPicPr>
+            <a:picLocks noChangeAspect="1"/>
+          </p:cNvPicPr>
+          <p:nvPr/>
+        </p:nvPicPr>
+        <p:blipFill>
+          <a:blip r:embed="rId3"/>
+          <a:stretch>
+            <a:fillRect/>
+          </a:stretch>
+        </p:blipFill>
+        <p:spPr>
+          <a:xfrm>
+            <a:off x="3209544" y="2400000"/>
+            <a:ext cx="2788920" cy="2200000"/>
+          </a:xfrm>
+          <a:prstGeom prst="rect">
+            <a:avLst/>
+          </a:prstGeom>
+        </p:spPr>
+      </p:pic>
+      <p:sp>
+        <p:nvSpPr>
+          <p:cNvPr id="11" name="TextBox 10"/>
+          <p:cNvSpPr txBox="1"/>
+          <p:nvPr/>
+        </p:nvSpPr>
+        <p:spPr>
+          <a:xfrm>
+            <a:off x="3209544" y="4620000"/>
+            <a:ext cx="2788920" cy="292608"/>
+          </a:xfrm>
+          <a:prstGeom prst="rect">
+            <a:avLst/>
+          </a:prstGeom>
+          <a:noFill/>
+        </p:spPr>
+        <p:txBody>
+          <a:bodyPr wrap="square">
+            <a:spAutoFit/>
+          </a:bodyPr>
+          <a:lstStyle/>
+          <a:p>
+            <a:pPr algn="ctr"/>
+            <a:r>
+              <a:rPr sz="1400" b="1">
+                <a:solidFill>
+                  <a:srgbClr val="212121"/>
+                </a:solidFill>
+                <a:latin typeface="微软雅黑"/>
+                <a:ea typeface="微软雅黑"/>
+              </a:rPr>
+              <a:t>2 想科目</a:t>
+            </a:r>
+          </a:p>
+        </p:txBody>
+      </p:sp>
+      <p:pic>
+        <p:nvPicPr>
+          <p:cNvPr id="12" name="Picture 11" descr="image.jpg"/>
+          <p:cNvPicPr>
+            <a:picLocks noChangeAspect="1"/>
+          </p:cNvPicPr>
+          <p:nvPr/>
+        </p:nvPicPr>
+        <p:blipFill>
+          <a:blip r:embed="rId4"/>
+          <a:stretch>
+            <a:fillRect/>
+          </a:stretch>
+        </p:blipFill>
+        <p:spPr>
+          <a:xfrm>
+            <a:off x="6163056" y="2400000"/>
+            <a:ext cx="2788920" cy="2200000"/>
+          </a:xfrm>
+          <a:prstGeom prst="rect">
+            <a:avLst/>
+          </a:prstGeom>
+        </p:spPr>
+      </p:pic>
+      <p:sp>
+        <p:nvSpPr>
+          <p:cNvPr id="13" name="TextBox 12"/>
+          <p:cNvSpPr txBox="1"/>
+          <p:nvPr/>
+        </p:nvSpPr>
+        <p:spPr>
+          <a:xfrm>
+            <a:off x="6163056" y="4620000"/>
+            <a:ext cx="2788920" cy="292608"/>
+          </a:xfrm>
+          <a:prstGeom prst="rect">
+            <a:avLst/>
+          </a:prstGeom>
+          <a:noFill/>
+        </p:spPr>
+        <p:txBody>
+          <a:bodyPr wrap="square">
+            <a:spAutoFit/>
+          </a:bodyPr>
+          <a:lstStyle/>
+          <a:p>
+            <a:pPr algn="ctr"/>
+            <a:r>
+              <a:rPr sz="1400" b="1">
+                <a:solidFill>
+                  <a:srgbClr val="212121"/>
+                </a:solidFill>
+                <a:latin typeface="微软雅黑"/>
+                <a:ea typeface="微软雅黑"/>
+              </a:rPr>
+              <a:t>3 填凭证</a:t>
+            </a:r>
+          </a:p>
+        </p:txBody>
+      </p:sp>
+      <p:pic>
+        <p:nvPicPr>
+          <p:cNvPr id="14" name="Picture 13" descr="image.jpg"/>
+          <p:cNvPicPr>
+            <a:picLocks noChangeAspect="1"/>
+          </p:cNvPicPr>
+          <p:nvPr/>
+        </p:nvPicPr>
+        <p:blipFill>
+          <a:blip r:embed="rId5"/>
+          <a:stretch>
+            <a:fillRect/>
+          </a:stretch>
+        </p:blipFill>
+        <p:spPr>
+          <a:xfrm>
+            <a:off x="9116567" y="2400000"/>
+            <a:ext cx="2788920" cy="2200000"/>
+          </a:xfrm>
+          <a:prstGeom prst="rect">
+            <a:avLst/>
+          </a:prstGeom>
+        </p:spPr>
+      </p:pic>
+      <p:sp>
+        <p:nvSpPr>
+          <p:cNvPr id="15" name="TextBox 14"/>
+          <p:cNvSpPr txBox="1"/>
+          <p:nvPr/>
+        </p:nvSpPr>
+        <p:spPr>
+          <a:xfrm>
+            <a:off x="9116567" y="4620000"/>
+            <a:ext cx="2788920" cy="292608"/>
+          </a:xfrm>
+          <a:prstGeom prst="rect">
+            <a:avLst/>
+          </a:prstGeom>
+          <a:noFill/>
+        </p:spPr>
+        <p:txBody>
+          <a:bodyPr wrap="square">
+            <a:spAutoFit/>
+          </a:bodyPr>
+          <a:lstStyle/>
+          <a:p>
+            <a:pPr algn="ctr"/>
+            <a:r>
+              <a:rPr sz="1400" b="1">
+                <a:solidFill>
+                  <a:srgbClr val="212121"/>
+                </a:solidFill>
+                <a:latin typeface="微软雅黑"/>
+                <a:ea typeface="微软雅黑"/>
+              </a:rPr>
+              <a:t>4 钉在一起</a:t>
             </a:r>
           </a:p>
         </p:txBody>
@@ -5298,9 +5520,7 @@
                 <a:ea typeface="微软雅黑"/>
                 <a:cs typeface="微软雅黑"/>
               </a:rPr>
-              <a:t>不是同桌互相改作业。全班盯下一张「有错的凭证」抢着找。
-写在记录册。1 分钟。找出 2 处 2 分，3 处全对 5 分。
-只认通用记账凭证。下一页就是那张错凭证，不用打开别的文件。</a:t>
+              <a:t>找茬挑战　这张凭证有错</a:t>
             </a:r>
           </a:p>
         </p:txBody>
@@ -5341,9 +5561,7 @@
                 <a:ea typeface="微软雅黑"/>
                 <a:cs typeface="微软雅黑"/>
               </a:rPr>
-              <a:t>不是同桌互相改作业。全班盯下一张「有错的凭证」抢着找。
-写在记录册。1 分钟。找出 2 处 2 分，3 处全对 5 分。
-只认通用记账凭证。下一页就是那张错凭证，不用打开别的文件。</a:t>
+              <a:t>为什么：练的是审核——科目有没有写错、附件够不够、自己填的自己能不能审。</a:t>
             </a:r>
           </a:p>
           <a:p>
@@ -5353,7 +5571,7 @@
               </a:spcAft>
             </a:pPr>
             <a:r>
-              <a:rPr sz="2200" b="0">
+              <a:rPr sz="2000" b="0">
                 <a:solidFill>
                   <a:srgbClr val="212121"/>
                 </a:solidFill>
@@ -5361,7 +5579,7 @@
                 <a:ea typeface="微软雅黑"/>
                 <a:cs typeface="微软雅黑"/>
               </a:rPr>
-              <a:t/>
+              <a:t>不是同桌互相改作业。全班盯下一张「有错的凭证」抢着找。</a:t>
             </a:r>
           </a:p>
           <a:p>
@@ -5371,7 +5589,7 @@
               </a:spcAft>
             </a:pPr>
             <a:r>
-              <a:rPr sz="2200" b="0">
+              <a:rPr sz="2000" b="0">
                 <a:solidFill>
                   <a:srgbClr val="212121"/>
                 </a:solidFill>
@@ -5379,7 +5597,25 @@
                 <a:ea typeface="微软雅黑"/>
                 <a:cs typeface="微软雅黑"/>
               </a:rPr>
-              <a:t/>
+              <a:t>写在记录册。1 分钟。找出 2 处 2 分，3 处全对 5 分。</a:t>
+            </a:r>
+          </a:p>
+          <a:p>
+            <a:pPr algn="l">
+              <a:spcAft>
+                <a:spcPts val="400"/>
+              </a:spcAft>
+            </a:pPr>
+            <a:r>
+              <a:rPr sz="2000" b="0">
+                <a:solidFill>
+                  <a:srgbClr val="212121"/>
+                </a:solidFill>
+                <a:latin typeface="微软雅黑"/>
+                <a:ea typeface="微软雅黑"/>
+                <a:cs typeface="微软雅黑"/>
+              </a:rPr>
+              <a:t>下一页就是那张错凭证，不用打开别的文件。</a:t>
             </a:r>
           </a:p>
         </p:txBody>
